--- a/docs/Презентация.pptx
+++ b/docs/Презентация.pptx
@@ -6206,7 +6206,7 @@
       </p:sp>
       <p:pic>
         <p:nvPicPr>
-          <p:cNvPr id="3" name="Image 0" descr="preencoded.png"/>
+          <p:cNvPr id="3" name="Image 0"/>
           <p:cNvPicPr>
             <a:picLocks noChangeAspect="1"/>
           </p:cNvPicPr>
@@ -6214,14 +6214,13 @@
         </p:nvPicPr>
         <p:blipFill>
           <a:blip r:embed="rId3"/>
-          <a:stretch>
-            <a:fillRect/>
-          </a:stretch>
+          <a:srcRect/>
+          <a:stretch/>
         </p:blipFill>
         <p:spPr>
           <a:xfrm>
-            <a:off x="523577" y="1181993"/>
-            <a:ext cx="1092622" cy="1365721"/>
+            <a:off x="762601" y="1181993"/>
+            <a:ext cx="614574" cy="1365721"/>
           </a:xfrm>
           <a:prstGeom prst="rect">
             <a:avLst/>
@@ -6318,7 +6317,7 @@
       </p:sp>
       <p:pic>
         <p:nvPicPr>
-          <p:cNvPr id="6" name="Image 1" descr="preencoded.png"/>
+          <p:cNvPr id="6" name="Image 1"/>
           <p:cNvPicPr>
             <a:picLocks noChangeAspect="1"/>
           </p:cNvPicPr>
@@ -6326,14 +6325,13 @@
         </p:nvPicPr>
         <p:blipFill>
           <a:blip r:embed="rId4"/>
-          <a:stretch>
-            <a:fillRect/>
-          </a:stretch>
+          <a:srcRect/>
+          <a:stretch/>
         </p:blipFill>
         <p:spPr>
           <a:xfrm>
-            <a:off x="2594521" y="1181993"/>
-            <a:ext cx="1092622" cy="1365721"/>
+            <a:off x="2833545" y="1181993"/>
+            <a:ext cx="614574" cy="1365721"/>
           </a:xfrm>
           <a:prstGeom prst="rect">
             <a:avLst/>
@@ -6430,7 +6428,7 @@
       </p:sp>
       <p:pic>
         <p:nvPicPr>
-          <p:cNvPr id="9" name="Image 2" descr="preencoded.png"/>
+          <p:cNvPr id="9" name="Image 2"/>
           <p:cNvPicPr>
             <a:picLocks noChangeAspect="1"/>
           </p:cNvPicPr>
@@ -6438,14 +6436,13 @@
         </p:nvPicPr>
         <p:blipFill>
           <a:blip r:embed="rId5"/>
-          <a:stretch>
-            <a:fillRect/>
-          </a:stretch>
+          <a:srcRect/>
+          <a:stretch/>
         </p:blipFill>
         <p:spPr>
           <a:xfrm>
-            <a:off x="4665464" y="1181993"/>
-            <a:ext cx="1092622" cy="1365721"/>
+            <a:off x="4904488" y="1181993"/>
+            <a:ext cx="614574" cy="1365721"/>
           </a:xfrm>
           <a:prstGeom prst="rect">
             <a:avLst/>
@@ -6540,7 +6537,7 @@
       </p:sp>
       <p:pic>
         <p:nvPicPr>
-          <p:cNvPr id="12" name="Image 3" descr="preencoded.png"/>
+          <p:cNvPr id="12" name="Image 3"/>
           <p:cNvPicPr>
             <a:picLocks noChangeAspect="1"/>
           </p:cNvPicPr>
@@ -6548,14 +6545,13 @@
         </p:nvPicPr>
         <p:blipFill>
           <a:blip r:embed="rId6"/>
-          <a:stretch>
-            <a:fillRect/>
-          </a:stretch>
+          <a:srcRect/>
+          <a:stretch/>
         </p:blipFill>
         <p:spPr>
           <a:xfrm>
-            <a:off x="6736407" y="1181993"/>
-            <a:ext cx="1092696" cy="1365870"/>
+            <a:off x="6975434" y="1181993"/>
+            <a:ext cx="614641" cy="1365870"/>
           </a:xfrm>
           <a:prstGeom prst="rect">
             <a:avLst/>
